--- a/MonadLens演示.pptx
+++ b/MonadLens演示.pptx
@@ -3254,7 +3254,7 @@
                 </a:solidFill>
                 <a:latin typeface="Microsoft YaHei"/>
               </a:rPr>
-              <a:t>看清网络，看清后果</a:t>
+              <a:t>透视链 · 看清网络，看清后果</a:t>
             </a:r>
           </a:p>
         </p:txBody>
